--- a/docs/slides/AI冲击下的行动准备_全院教师汇报.pptx
+++ b/docs/slides/AI冲击下的行动准备_全院教师汇报.pptx
@@ -2932,7 +2932,7 @@
                 <a:latin typeface="Segoe UI"/>
                 <a:ea typeface="微软雅黑"/>
               </a:rPr>
-              <a:t>下面每一条都写了逐条研判文档，吸收什么、不吸收什么、为什么</a:t>
+              <a:t>三家同行各写了一份逐条研判，都在 docs/ 下：《OpenMAIC 研判》《DeepTutor 研判》《LearnVector 研判》</a:t>
             </a:r>
           </a:p>
         </p:txBody>
@@ -2945,7 +2945,7 @@
         </p:nvGraphicFramePr>
         <p:xfrm>
           <a:off x="720000" y="1700000"/>
-          <a:ext cx="10752000" cy="4409750"/>
+          <a:ext cx="10752000" cy="4683300"/>
         </p:xfrm>
         <a:graphic>
           <a:graphicData uri="http://schemas.openxmlformats.org/drawingml/2006/table">
@@ -2956,23 +2956,23 @@
                 <a:gridCol w="3973565"/>
                 <a:gridCol w="3739826"/>
               </a:tblGrid>
-              <a:tr h="463050">
-                <a:tc>
-                  <a:txBody>
-                    <a:bodyPr/>
-                    <a:lstStyle/>
-                    <a:p>
-                      <a:pPr lvl="0" marL="0" indent="0" algn="l">
-                        <a:lnSpc>
-                          <a:spcPct val="118000"/>
-                        </a:lnSpc>
-                        <a:spcBef>
-                          <a:spcPts val="0"/>
-                        </a:spcBef>
-                        <a:buNone/>
-                      </a:pPr>
-                      <a:r>
-                        <a:rPr lang="zh-CN" altLang="en-US" sz="1000" b="1" dirty="0">
+              <a:tr h="517660">
+                <a:tc>
+                  <a:txBody>
+                    <a:bodyPr/>
+                    <a:lstStyle/>
+                    <a:p>
+                      <a:pPr lvl="0" marL="0" indent="0" algn="l">
+                        <a:lnSpc>
+                          <a:spcPct val="118000"/>
+                        </a:lnSpc>
+                        <a:spcBef>
+                          <a:spcPts val="0"/>
+                        </a:spcBef>
+                        <a:buNone/>
+                      </a:pPr>
+                      <a:r>
+                        <a:rPr lang="zh-CN" altLang="en-US" sz="1200" b="1" dirty="0">
                           <a:solidFill>
                             <a:srgbClr val="1B1F24"/>
                           </a:solidFill>
@@ -3009,7 +3009,7 @@
                         <a:buNone/>
                       </a:pPr>
                       <a:r>
-                        <a:rPr lang="zh-CN" altLang="en-US" sz="1000" b="1" dirty="0">
+                        <a:rPr lang="zh-CN" altLang="en-US" sz="1200" b="1" dirty="0">
                           <a:solidFill>
                             <a:srgbClr val="1B1F24"/>
                           </a:solidFill>
@@ -3046,7 +3046,7 @@
                         <a:buNone/>
                       </a:pPr>
                       <a:r>
-                        <a:rPr lang="zh-CN" altLang="en-US" sz="1000" b="1" dirty="0">
+                        <a:rPr lang="zh-CN" altLang="en-US" sz="1200" b="1" dirty="0">
                           <a:solidFill>
                             <a:srgbClr val="1B1F24"/>
                           </a:solidFill>
@@ -3069,40 +3069,40 @@
                   </a:tcPr>
                 </a:tc>
               </a:tr>
-              <a:tr h="609100">
-                <a:tc>
-                  <a:txBody>
-                    <a:bodyPr/>
-                    <a:lstStyle/>
-                    <a:p>
-                      <a:pPr lvl="0" marL="0" indent="0" algn="l">
-                        <a:lnSpc>
-                          <a:spcPct val="118000"/>
-                        </a:lnSpc>
-                        <a:spcBef>
-                          <a:spcPts val="0"/>
-                        </a:spcBef>
-                        <a:buNone/>
-                      </a:pPr>
-                      <a:r>
-                        <a:rPr lang="zh-CN" altLang="en-US" sz="1000" b="1" dirty="0">
-                          <a:solidFill>
-                            <a:srgbClr val="333333"/>
-                          </a:solidFill>
-                          <a:latin typeface="Segoe UI"/>
-                          <a:ea typeface="微软雅黑"/>
-                        </a:rPr>
-                        <a:t>Bloom 两个标准差</a:t>
-                      </a:r>
-                      <a:r>
-                        <a:rPr lang="zh-CN" altLang="en-US" sz="1000" dirty="0">
-                          <a:solidFill>
-                            <a:srgbClr val="333333"/>
-                          </a:solidFill>
-                          <a:latin typeface="Segoe UI"/>
-                          <a:ea typeface="微软雅黑"/>
-                        </a:rPr>
-                        <a:t>（掌握学习 / 一对一辅导）</a:t>
+              <a:tr h="868180">
+                <a:tc>
+                  <a:txBody>
+                    <a:bodyPr/>
+                    <a:lstStyle/>
+                    <a:p>
+                      <a:pPr lvl="0" marL="0" indent="0" algn="l">
+                        <a:lnSpc>
+                          <a:spcPct val="118000"/>
+                        </a:lnSpc>
+                        <a:spcBef>
+                          <a:spcPts val="0"/>
+                        </a:spcBef>
+                        <a:buNone/>
+                      </a:pPr>
+                      <a:r>
+                        <a:rPr lang="zh-CN" altLang="en-US" sz="1200" b="1" dirty="0">
+                          <a:solidFill>
+                            <a:srgbClr val="333333"/>
+                          </a:solidFill>
+                          <a:latin typeface="Segoe UI"/>
+                          <a:ea typeface="微软雅黑"/>
+                        </a:rPr>
+                        <a:t>理论根基</a:t>
+                      </a:r>
+                      <a:r>
+                        <a:rPr lang="zh-CN" altLang="en-US" sz="1200" dirty="0">
+                          <a:solidFill>
+                            <a:srgbClr val="333333"/>
+                          </a:solidFill>
+                          <a:latin typeface="Segoe UI"/>
+                          <a:ea typeface="微软雅黑"/>
+                        </a:rPr>
+                        <a:t>：Bloom 两个标准差、BKT 贝叶斯知识追踪</a:t>
                       </a:r>
                     </a:p>
                   </a:txBody>
@@ -3132,14 +3132,14 @@
                         <a:buNone/>
                       </a:pPr>
                       <a:r>
-                        <a:rPr lang="zh-CN" altLang="en-US" sz="1000" dirty="0">
-                          <a:solidFill>
-                            <a:srgbClr val="333333"/>
-                          </a:solidFill>
-                          <a:latin typeface="Segoe UI"/>
-                          <a:ea typeface="微软雅黑"/>
-                        </a:rPr>
-                        <a:t>一对一 + 掌握学习可比常规班级教学高出约 2 个标准差</a:t>
+                        <a:rPr lang="zh-CN" altLang="en-US" sz="1200" dirty="0">
+                          <a:solidFill>
+                            <a:srgbClr val="333333"/>
+                          </a:solidFill>
+                          <a:latin typeface="Segoe UI"/>
+                          <a:ea typeface="微软雅黑"/>
+                        </a:rPr>
+                        <a:t>一对一 + 掌握学习可高出常规班级约 2 个标准差；掌握度可由答题序列推出</a:t>
                       </a:r>
                     </a:p>
                   </a:txBody>
@@ -3169,24 +3169,24 @@
                         <a:buNone/>
                       </a:pPr>
                       <a:r>
-                        <a:rPr lang="zh-CN" altLang="en-US" sz="1000" b="1" dirty="0">
-                          <a:solidFill>
-                            <a:srgbClr val="333333"/>
-                          </a:solidFill>
-                          <a:latin typeface="Segoe UI"/>
-                          <a:ea typeface="微软雅黑"/>
-                        </a:rPr>
-                        <a:t>学生 Agent 的目标就是它</a:t>
-                      </a:r>
-                      <a:r>
-                        <a:rPr lang="zh-CN" altLang="en-US" sz="1000" dirty="0">
-                          <a:solidFill>
-                            <a:srgbClr val="333333"/>
-                          </a:solidFill>
-                          <a:latin typeface="Segoe UI"/>
-                          <a:ea typeface="微软雅黑"/>
-                        </a:rPr>
-                        <a:t>：把 1–2 个 σ 用工程手段做到规模化</a:t>
+                        <a:rPr lang="zh-CN" altLang="en-US" sz="1200" b="1" dirty="0">
+                          <a:solidFill>
+                            <a:srgbClr val="333333"/>
+                          </a:solidFill>
+                          <a:latin typeface="Segoe UI"/>
+                          <a:ea typeface="微软雅黑"/>
+                        </a:rPr>
+                        <a:t>学生 Agent 的目标就是这 1–2 个 σ</a:t>
+                      </a:r>
+                      <a:r>
+                        <a:rPr lang="zh-CN" altLang="en-US" sz="1200" dirty="0">
+                          <a:solidFill>
+                            <a:srgbClr val="333333"/>
+                          </a:solidFill>
+                          <a:latin typeface="Segoe UI"/>
+                          <a:ea typeface="微软雅黑"/>
+                        </a:rPr>
+                        <a:t>；BKT 做算法内核，我们在它之上加了验证与遗忘</a:t>
                       </a:r>
                     </a:p>
                   </a:txBody>
@@ -3202,23 +3202,156 @@
                   </a:tcPr>
                 </a:tc>
               </a:tr>
-              <a:tr h="755150">
-                <a:tc>
-                  <a:txBody>
-                    <a:bodyPr/>
-                    <a:lstStyle/>
-                    <a:p>
-                      <a:pPr lvl="0" marL="0" indent="0" algn="l">
-                        <a:lnSpc>
-                          <a:spcPct val="118000"/>
-                        </a:lnSpc>
-                        <a:spcBef>
-                          <a:spcPts val="0"/>
-                        </a:spcBef>
-                        <a:buNone/>
-                      </a:pPr>
-                      <a:r>
-                        <a:rPr lang="zh-CN" altLang="en-US" sz="1000" b="1" dirty="0">
+              <a:tr h="868180">
+                <a:tc>
+                  <a:txBody>
+                    <a:bodyPr/>
+                    <a:lstStyle/>
+                    <a:p>
+                      <a:pPr lvl="0" marL="0" indent="0" algn="l">
+                        <a:lnSpc>
+                          <a:spcPct val="118000"/>
+                        </a:lnSpc>
+                        <a:spcBef>
+                          <a:spcPts val="0"/>
+                        </a:spcBef>
+                        <a:buNone/>
+                      </a:pPr>
+                      <a:r>
+                        <a:rPr lang="zh-CN" altLang="en-US" sz="1200" b="1" dirty="0">
+                          <a:solidFill>
+                            <a:srgbClr val="333333"/>
+                          </a:solidFill>
+                          <a:latin typeface="Segoe UI"/>
+                          <a:ea typeface="微软雅黑"/>
+                        </a:rPr>
+                        <a:t>OpenMAIC</a:t>
+                      </a:r>
+                      <a:r>
+                        <a:rPr lang="zh-CN" altLang="en-US" sz="1200" dirty="0">
+                          <a:solidFill>
+                            <a:srgbClr val="333333"/>
+                          </a:solidFill>
+                          <a:latin typeface="Segoe UI"/>
+                          <a:ea typeface="微软雅黑"/>
+                        </a:rPr>
+                        <a:t>　清华 THU-MAIC　MIT　3.1 万星　JCST'26</a:t>
+                      </a:r>
+                    </a:p>
+                  </a:txBody>
+                  <a:tcPr marL="91440" marR="91440" marT="45720" marB="45720" anchor="ctr">
+                    <a:lnB w="6350">
+                      <a:solidFill>
+                        <a:srgbClr val="E5E7EB"/>
+                      </a:solidFill>
+                    </a:lnB>
+                    <a:solidFill>
+                      <a:srgbClr val="FFFFFF"/>
+                    </a:solidFill>
+                  </a:tcPr>
+                </a:tc>
+                <a:tc>
+                  <a:txBody>
+                    <a:bodyPr/>
+                    <a:lstStyle/>
+                    <a:p>
+                      <a:pPr lvl="0" marL="0" indent="0" algn="l">
+                        <a:lnSpc>
+                          <a:spcPct val="118000"/>
+                        </a:lnSpc>
+                        <a:spcBef>
+                          <a:spcPts val="0"/>
+                        </a:spcBef>
+                        <a:buNone/>
+                      </a:pPr>
+                      <a:r>
+                        <a:rPr lang="zh-CN" altLang="en-US" sz="1200" dirty="0">
+                          <a:solidFill>
+                            <a:srgbClr val="333333"/>
+                          </a:solidFill>
+                          <a:latin typeface="Segoe UI"/>
+                          <a:ea typeface="微软雅黑"/>
+                        </a:rPr>
+                        <a:t>多智能体课堂：AI 教师 + AI 同学；一键从材料成课；内置 20 个 SKILL.md 技能包</a:t>
+                      </a:r>
+                    </a:p>
+                  </a:txBody>
+                  <a:tcPr marL="91440" marR="91440" marT="45720" marB="45720" anchor="ctr">
+                    <a:lnB w="6350">
+                      <a:solidFill>
+                        <a:srgbClr val="E5E7EB"/>
+                      </a:solidFill>
+                    </a:lnB>
+                    <a:solidFill>
+                      <a:srgbClr val="FFFFFF"/>
+                    </a:solidFill>
+                  </a:tcPr>
+                </a:tc>
+                <a:tc>
+                  <a:txBody>
+                    <a:bodyPr/>
+                    <a:lstStyle/>
+                    <a:p>
+                      <a:pPr lvl="0" marL="0" indent="0" algn="l">
+                        <a:lnSpc>
+                          <a:spcPct val="118000"/>
+                        </a:lnSpc>
+                        <a:spcBef>
+                          <a:spcPts val="0"/>
+                        </a:spcBef>
+                        <a:buNone/>
+                      </a:pPr>
+                      <a:r>
+                        <a:rPr lang="zh-CN" altLang="en-US" sz="1200" b="1" dirty="0">
+                          <a:solidFill>
+                            <a:srgbClr val="333333"/>
+                          </a:solidFill>
+                          <a:latin typeface="Segoe UI"/>
+                          <a:ea typeface="微软雅黑"/>
+                        </a:rPr>
+                        <a:t>印证了上一页那张构想图不是空想</a:t>
+                      </a:r>
+                      <a:r>
+                        <a:rPr lang="zh-CN" altLang="en-US" sz="1200" dirty="0">
+                          <a:solidFill>
+                            <a:srgbClr val="333333"/>
+                          </a:solidFill>
+                          <a:latin typeface="Segoe UI"/>
+                          <a:ea typeface="微软雅黑"/>
+                        </a:rPr>
+                        <a:t>；课件链路与 SKILL.md 格式我们已有，但排版走确定性代码，模型只写讲解词</a:t>
+                      </a:r>
+                    </a:p>
+                  </a:txBody>
+                  <a:tcPr marL="91440" marR="91440" marT="45720" marB="45720" anchor="ctr">
+                    <a:lnB w="6350">
+                      <a:solidFill>
+                        <a:srgbClr val="E5E7EB"/>
+                      </a:solidFill>
+                    </a:lnB>
+                    <a:solidFill>
+                      <a:srgbClr val="FFFFFF"/>
+                    </a:solidFill>
+                  </a:tcPr>
+                </a:tc>
+              </a:tr>
+              <a:tr h="692920">
+                <a:tc>
+                  <a:txBody>
+                    <a:bodyPr/>
+                    <a:lstStyle/>
+                    <a:p>
+                      <a:pPr lvl="0" marL="0" indent="0" algn="l">
+                        <a:lnSpc>
+                          <a:spcPct val="118000"/>
+                        </a:lnSpc>
+                        <a:spcBef>
+                          <a:spcPts val="0"/>
+                        </a:spcBef>
+                        <a:buNone/>
+                      </a:pPr>
+                      <a:r>
+                        <a:rPr lang="zh-CN" altLang="en-US" sz="1200" b="1" dirty="0">
                           <a:solidFill>
                             <a:srgbClr val="333333"/>
                           </a:solidFill>
@@ -3228,14 +3361,14 @@
                         <a:t>DeepTutor</a:t>
                       </a:r>
                       <a:r>
-                        <a:rPr lang="zh-CN" altLang="en-US" sz="1000" dirty="0">
-                          <a:solidFill>
-                            <a:srgbClr val="333333"/>
-                          </a:solidFill>
-                          <a:latin typeface="Segoe UI"/>
-                          <a:ea typeface="微软雅黑"/>
-                        </a:rPr>
-                        <a:t>（HKUDS，香港大学数据智能实验室，开源 Apache-2.0）</a:t>
+                        <a:rPr lang="zh-CN" altLang="en-US" sz="1200" dirty="0">
+                          <a:solidFill>
+                            <a:srgbClr val="333333"/>
+                          </a:solidFill>
+                          <a:latin typeface="Segoe UI"/>
+                          <a:ea typeface="微软雅黑"/>
+                        </a:rPr>
+                        <a:t>　香港大学 HKUDS　Apache-2.0</a:t>
                       </a:r>
                     </a:p>
                   </a:txBody>
@@ -3265,14 +3398,14 @@
                         <a:buNone/>
                       </a:pPr>
                       <a:r>
-                        <a:rPr lang="zh-CN" altLang="en-US" sz="1000" dirty="0">
-                          <a:solidFill>
-                            <a:srgbClr val="333333"/>
-                          </a:solidFill>
-                          <a:latin typeface="Segoe UI"/>
-                          <a:ea typeface="微软雅黑"/>
-                        </a:rPr>
-                        <a:t>一个 agent loop 跑出题、批改、分步解题、限域调研、图示、技能包</a:t>
+                        <a:rPr lang="zh-CN" altLang="en-US" sz="1200" dirty="0">
+                          <a:solidFill>
+                            <a:srgbClr val="333333"/>
+                          </a:solidFill>
+                          <a:latin typeface="Segoe UI"/>
+                          <a:ea typeface="微软雅黑"/>
+                        </a:rPr>
+                        <a:t>一个 agent loop 跑出题、批改、分步解题、限域调研、图示</a:t>
                       </a:r>
                     </a:p>
                   </a:txBody>
@@ -3302,7 +3435,7 @@
                         <a:buNone/>
                       </a:pPr>
                       <a:r>
-                        <a:rPr lang="zh-CN" altLang="en-US" sz="1000" b="1" dirty="0">
+                        <a:rPr lang="zh-CN" altLang="en-US" sz="1200" b="1" dirty="0">
                           <a:solidFill>
                             <a:srgbClr val="333333"/>
                           </a:solidFill>
@@ -3312,7 +3445,7 @@
                         <a:t>能力面全抄，判定权不让</a:t>
                       </a:r>
                       <a:r>
-                        <a:rPr lang="zh-CN" altLang="en-US" sz="1000" dirty="0">
+                        <a:rPr lang="zh-CN" altLang="en-US" sz="1200" dirty="0">
                           <a:solidFill>
                             <a:srgbClr val="333333"/>
                           </a:solidFill>
@@ -3335,23 +3468,23 @@
                   </a:tcPr>
                 </a:tc>
               </a:tr>
-              <a:tr h="755150">
-                <a:tc>
-                  <a:txBody>
-                    <a:bodyPr/>
-                    <a:lstStyle/>
-                    <a:p>
-                      <a:pPr lvl="0" marL="0" indent="0" algn="l">
-                        <a:lnSpc>
-                          <a:spcPct val="118000"/>
-                        </a:lnSpc>
-                        <a:spcBef>
-                          <a:spcPts val="0"/>
-                        </a:spcBef>
-                        <a:buNone/>
-                      </a:pPr>
-                      <a:r>
-                        <a:rPr lang="zh-CN" altLang="en-US" sz="1000" b="1" dirty="0">
+              <a:tr h="868180">
+                <a:tc>
+                  <a:txBody>
+                    <a:bodyPr/>
+                    <a:lstStyle/>
+                    <a:p>
+                      <a:pPr lvl="0" marL="0" indent="0" algn="l">
+                        <a:lnSpc>
+                          <a:spcPct val="118000"/>
+                        </a:lnSpc>
+                        <a:spcBef>
+                          <a:spcPts val="0"/>
+                        </a:spcBef>
+                        <a:buNone/>
+                      </a:pPr>
+                      <a:r>
+                        <a:rPr lang="zh-CN" altLang="en-US" sz="1200" b="1" dirty="0">
                           <a:solidFill>
                             <a:srgbClr val="333333"/>
                           </a:solidFill>
@@ -3361,14 +3494,14 @@
                         <a:t>LearnVector</a:t>
                       </a:r>
                       <a:r>
-                        <a:rPr lang="zh-CN" altLang="en-US" sz="1000" dirty="0">
-                          <a:solidFill>
-                            <a:srgbClr val="333333"/>
-                          </a:solidFill>
-                          <a:latin typeface="Segoe UI"/>
-                          <a:ea typeface="微软雅黑"/>
-                        </a:rPr>
-                        <a:t>（吴恩达，2026-07，Coursera 战投 1 亿美元）</a:t>
+                        <a:rPr lang="zh-CN" altLang="en-US" sz="1200" dirty="0">
+                          <a:solidFill>
+                            <a:srgbClr val="333333"/>
+                          </a:solidFill>
+                          <a:latin typeface="Segoe UI"/>
+                          <a:ea typeface="微软雅黑"/>
+                        </a:rPr>
+                        <a:t>　吴恩达　Coursera 战投 1 亿美元</a:t>
                       </a:r>
                     </a:p>
                   </a:txBody>
@@ -3398,7 +3531,7 @@
                         <a:buNone/>
                       </a:pPr>
                       <a:r>
-                        <a:rPr lang="zh-CN" altLang="en-US" sz="1000" dirty="0">
+                        <a:rPr lang="zh-CN" altLang="en-US" sz="1200" dirty="0">
                           <a:solidFill>
                             <a:srgbClr val="333333"/>
                           </a:solidFill>
@@ -3435,14 +3568,14 @@
                         <a:buNone/>
                       </a:pPr>
                       <a:r>
-                        <a:rPr lang="zh-CN" altLang="en-US" sz="1000" dirty="0">
-                          <a:solidFill>
-                            <a:srgbClr val="333333"/>
-                          </a:solidFill>
-                          <a:latin typeface="Segoe UI"/>
-                          <a:ea typeface="微软雅黑"/>
-                        </a:rPr>
-                        <a:t>落成可判定规则：跨时间验证、遗忘复检、提示依赖度三个派生视图</a:t>
+                        <a:rPr lang="zh-CN" altLang="en-US" sz="1200" dirty="0">
+                          <a:solidFill>
+                            <a:srgbClr val="333333"/>
+                          </a:solidFill>
+                          <a:latin typeface="Segoe UI"/>
+                          <a:ea typeface="微软雅黑"/>
+                        </a:rPr>
+                        <a:t>落成可判定规则：跨时间验证、遗忘复检、提示依赖度</a:t>
                       </a:r>
                     </a:p>
                   </a:txBody>
@@ -3458,40 +3591,40 @@
                   </a:tcPr>
                 </a:tc>
               </a:tr>
-              <a:tr h="609100">
-                <a:tc>
-                  <a:txBody>
-                    <a:bodyPr/>
-                    <a:lstStyle/>
-                    <a:p>
-                      <a:pPr lvl="0" marL="0" indent="0" algn="l">
-                        <a:lnSpc>
-                          <a:spcPct val="118000"/>
-                        </a:lnSpc>
-                        <a:spcBef>
-                          <a:spcPts val="0"/>
-                        </a:spcBef>
-                        <a:buNone/>
-                      </a:pPr>
-                      <a:r>
-                        <a:rPr lang="zh-CN" altLang="en-US" sz="1000" b="1" dirty="0">
-                          <a:solidFill>
-                            <a:srgbClr val="333333"/>
-                          </a:solidFill>
-                          <a:latin typeface="Segoe UI"/>
-                          <a:ea typeface="微软雅黑"/>
-                        </a:rPr>
-                        <a:t>Khanmigo</a:t>
-                      </a:r>
-                      <a:r>
-                        <a:rPr lang="zh-CN" altLang="en-US" sz="1000" dirty="0">
-                          <a:solidFill>
-                            <a:srgbClr val="333333"/>
-                          </a:solidFill>
-                          <a:latin typeface="Segoe UI"/>
-                          <a:ea typeface="微软雅黑"/>
-                        </a:rPr>
-                        <a:t>（可汗学院）</a:t>
+              <a:tr h="868180">
+                <a:tc>
+                  <a:txBody>
+                    <a:bodyPr/>
+                    <a:lstStyle/>
+                    <a:p>
+                      <a:pPr lvl="0" marL="0" indent="0" algn="l">
+                        <a:lnSpc>
+                          <a:spcPct val="118000"/>
+                        </a:lnSpc>
+                        <a:spcBef>
+                          <a:spcPts val="0"/>
+                        </a:spcBef>
+                        <a:buNone/>
+                      </a:pPr>
+                      <a:r>
+                        <a:rPr lang="zh-CN" altLang="en-US" sz="1200" b="1" dirty="0">
+                          <a:solidFill>
+                            <a:srgbClr val="333333"/>
+                          </a:solidFill>
+                          <a:latin typeface="Segoe UI"/>
+                          <a:ea typeface="微软雅黑"/>
+                        </a:rPr>
+                        <a:t>两条教训</a:t>
+                      </a:r>
+                      <a:r>
+                        <a:rPr lang="zh-CN" altLang="en-US" sz="1200" dirty="0">
+                          <a:solidFill>
+                            <a:srgbClr val="333333"/>
+                          </a:solidFill>
+                          <a:latin typeface="Segoe UI"/>
+                          <a:ea typeface="微软雅黑"/>
+                        </a:rPr>
+                        <a:t>：Khanmigo（可汗）、Alpha School</a:t>
                       </a:r>
                     </a:p>
                   </a:txBody>
@@ -3521,14 +3654,14 @@
                         <a:buNone/>
                       </a:pPr>
                       <a:r>
-                        <a:rPr lang="zh-CN" altLang="en-US" sz="1000" dirty="0">
-                          <a:solidFill>
-                            <a:srgbClr val="333333"/>
-                          </a:solidFill>
-                          <a:latin typeface="Segoe UI"/>
-                          <a:ea typeface="微软雅黑"/>
-                        </a:rPr>
-                        <a:t>公开数据：仅约 15% 的学生经常使用——最大难题在行为不在算法</a:t>
+                        <a:rPr lang="zh-CN" altLang="en-US" sz="1200" dirty="0">
+                          <a:solidFill>
+                            <a:srgbClr val="333333"/>
+                          </a:solidFill>
+                          <a:latin typeface="Segoe UI"/>
+                          <a:ea typeface="微软雅黑"/>
+                        </a:rPr>
+                        <a:t>前者仅约 15% 学生经常使用——难题在行为不在算法；后者宣称的成效经不起第三方核查</a:t>
                       </a:r>
                     </a:p>
                   </a:txBody>
@@ -3558,250 +3691,14 @@
                         <a:buNone/>
                       </a:pPr>
                       <a:r>
-                        <a:rPr lang="zh-CN" altLang="en-US" sz="1000" dirty="0">
-                          <a:solidFill>
-                            <a:srgbClr val="333333"/>
-                          </a:solidFill>
-                          <a:latin typeface="Segoe UI"/>
-                          <a:ea typeface="微软雅黑"/>
-                        </a:rPr>
-                        <a:t>把「主动使用率」列为四个合法优化目标之一</a:t>
-                      </a:r>
-                    </a:p>
-                  </a:txBody>
-                  <a:tcPr marL="91440" marR="91440" marT="45720" marB="45720" anchor="ctr">
-                    <a:lnB w="6350">
-                      <a:solidFill>
-                        <a:srgbClr val="E5E7EB"/>
-                      </a:solidFill>
-                    </a:lnB>
-                    <a:solidFill>
-                      <a:srgbClr val="FFFFFF"/>
-                    </a:solidFill>
-                  </a:tcPr>
-                </a:tc>
-              </a:tr>
-              <a:tr h="609100">
-                <a:tc>
-                  <a:txBody>
-                    <a:bodyPr/>
-                    <a:lstStyle/>
-                    <a:p>
-                      <a:pPr lvl="0" marL="0" indent="0" algn="l">
-                        <a:lnSpc>
-                          <a:spcPct val="118000"/>
-                        </a:lnSpc>
-                        <a:spcBef>
-                          <a:spcPts val="0"/>
-                        </a:spcBef>
-                        <a:buNone/>
-                      </a:pPr>
-                      <a:r>
-                        <a:rPr lang="zh-CN" altLang="en-US" sz="1000" b="1" dirty="0">
-                          <a:solidFill>
-                            <a:srgbClr val="333333"/>
-                          </a:solidFill>
-                          <a:latin typeface="Segoe UI"/>
-                          <a:ea typeface="微软雅黑"/>
-                        </a:rPr>
-                        <a:t>Alpha School 的教训</a:t>
-                      </a:r>
-                    </a:p>
-                  </a:txBody>
-                  <a:tcPr marL="91440" marR="91440" marT="45720" marB="45720" anchor="ctr">
-                    <a:lnB w="6350">
-                      <a:solidFill>
-                        <a:srgbClr val="E5E7EB"/>
-                      </a:solidFill>
-                    </a:lnB>
-                    <a:solidFill>
-                      <a:srgbClr val="FFFFFF"/>
-                    </a:solidFill>
-                  </a:tcPr>
-                </a:tc>
-                <a:tc>
-                  <a:txBody>
-                    <a:bodyPr/>
-                    <a:lstStyle/>
-                    <a:p>
-                      <a:pPr lvl="0" marL="0" indent="0" algn="l">
-                        <a:lnSpc>
-                          <a:spcPct val="118000"/>
-                        </a:lnSpc>
-                        <a:spcBef>
-                          <a:spcPts val="0"/>
-                        </a:spcBef>
-                        <a:buNone/>
-                      </a:pPr>
-                      <a:r>
-                        <a:rPr lang="zh-CN" altLang="en-US" sz="1000" dirty="0">
-                          <a:solidFill>
-                            <a:srgbClr val="333333"/>
-                          </a:solidFill>
-                          <a:latin typeface="Segoe UI"/>
-                          <a:ea typeface="微软雅黑"/>
-                        </a:rPr>
-                        <a:t>宣称的成效经不起第三方核查，是这类项目最典型的死法</a:t>
-                      </a:r>
-                    </a:p>
-                  </a:txBody>
-                  <a:tcPr marL="91440" marR="91440" marT="45720" marB="45720" anchor="ctr">
-                    <a:lnB w="6350">
-                      <a:solidFill>
-                        <a:srgbClr val="E5E7EB"/>
-                      </a:solidFill>
-                    </a:lnB>
-                    <a:solidFill>
-                      <a:srgbClr val="FFFFFF"/>
-                    </a:solidFill>
-                  </a:tcPr>
-                </a:tc>
-                <a:tc>
-                  <a:txBody>
-                    <a:bodyPr/>
-                    <a:lstStyle/>
-                    <a:p>
-                      <a:pPr lvl="0" marL="0" indent="0" algn="l">
-                        <a:lnSpc>
-                          <a:spcPct val="118000"/>
-                        </a:lnSpc>
-                        <a:spcBef>
-                          <a:spcPts val="0"/>
-                        </a:spcBef>
-                        <a:buNone/>
-                      </a:pPr>
-                      <a:r>
-                        <a:rPr lang="zh-CN" altLang="en-US" sz="1000" dirty="0">
-                          <a:solidFill>
-                            <a:srgbClr val="333333"/>
-                          </a:solidFill>
-                          <a:latin typeface="Segoe UI"/>
-                          <a:ea typeface="微软雅黑"/>
-                        </a:rPr>
-                        <a:t>`make replay`：任何人可拿走事件流自行重算全班状态</a:t>
-                      </a:r>
-                    </a:p>
-                  </a:txBody>
-                  <a:tcPr marL="91440" marR="91440" marT="45720" marB="45720" anchor="ctr">
-                    <a:lnB w="6350">
-                      <a:solidFill>
-                        <a:srgbClr val="E5E7EB"/>
-                      </a:solidFill>
-                    </a:lnB>
-                    <a:solidFill>
-                      <a:srgbClr val="FFFFFF"/>
-                    </a:solidFill>
-                  </a:tcPr>
-                </a:tc>
-              </a:tr>
-              <a:tr h="609100">
-                <a:tc>
-                  <a:txBody>
-                    <a:bodyPr/>
-                    <a:lstStyle/>
-                    <a:p>
-                      <a:pPr lvl="0" marL="0" indent="0" algn="l">
-                        <a:lnSpc>
-                          <a:spcPct val="118000"/>
-                        </a:lnSpc>
-                        <a:spcBef>
-                          <a:spcPts val="0"/>
-                        </a:spcBef>
-                        <a:buNone/>
-                      </a:pPr>
-                      <a:r>
-                        <a:rPr lang="zh-CN" altLang="en-US" sz="1000" b="1" dirty="0">
-                          <a:solidFill>
-                            <a:srgbClr val="333333"/>
-                          </a:solidFill>
-                          <a:latin typeface="Segoe UI"/>
-                          <a:ea typeface="微软雅黑"/>
-                        </a:rPr>
-                        <a:t>BKT 贝叶斯知识追踪</a:t>
-                      </a:r>
-                      <a:r>
-                        <a:rPr lang="zh-CN" altLang="en-US" sz="1000" dirty="0">
-                          <a:solidFill>
-                            <a:srgbClr val="333333"/>
-                          </a:solidFill>
-                          <a:latin typeface="Segoe UI"/>
-                          <a:ea typeface="微软雅黑"/>
-                        </a:rPr>
-                        <a:t>（经典）</a:t>
-                      </a:r>
-                    </a:p>
-                  </a:txBody>
-                  <a:tcPr marL="91440" marR="91440" marT="45720" marB="45720" anchor="ctr">
-                    <a:lnB w="6350">
-                      <a:solidFill>
-                        <a:srgbClr val="E5E7EB"/>
-                      </a:solidFill>
-                    </a:lnB>
-                    <a:solidFill>
-                      <a:srgbClr val="FFFFFF"/>
-                    </a:solidFill>
-                  </a:tcPr>
-                </a:tc>
-                <a:tc>
-                  <a:txBody>
-                    <a:bodyPr/>
-                    <a:lstStyle/>
-                    <a:p>
-                      <a:pPr lvl="0" marL="0" indent="0" algn="l">
-                        <a:lnSpc>
-                          <a:spcPct val="118000"/>
-                        </a:lnSpc>
-                        <a:spcBef>
-                          <a:spcPts val="0"/>
-                        </a:spcBef>
-                        <a:buNone/>
-                      </a:pPr>
-                      <a:r>
-                        <a:rPr lang="zh-CN" altLang="en-US" sz="1000" dirty="0">
-                          <a:solidFill>
-                            <a:srgbClr val="333333"/>
-                          </a:solidFill>
-                          <a:latin typeface="Segoe UI"/>
-                          <a:ea typeface="微软雅黑"/>
-                        </a:rPr>
-                        <a:t>从答题序列推掌握概率，按知识点存 slip / guess 参数</a:t>
-                      </a:r>
-                    </a:p>
-                  </a:txBody>
-                  <a:tcPr marL="91440" marR="91440" marT="45720" marB="45720" anchor="ctr">
-                    <a:lnB w="6350">
-                      <a:solidFill>
-                        <a:srgbClr val="E5E7EB"/>
-                      </a:solidFill>
-                    </a:lnB>
-                    <a:solidFill>
-                      <a:srgbClr val="FFFFFF"/>
-                    </a:solidFill>
-                  </a:tcPr>
-                </a:tc>
-                <a:tc>
-                  <a:txBody>
-                    <a:bodyPr/>
-                    <a:lstStyle/>
-                    <a:p>
-                      <a:pPr lvl="0" marL="0" indent="0" algn="l">
-                        <a:lnSpc>
-                          <a:spcPct val="118000"/>
-                        </a:lnSpc>
-                        <a:spcBef>
-                          <a:spcPts val="0"/>
-                        </a:spcBef>
-                        <a:buNone/>
-                      </a:pPr>
-                      <a:r>
-                        <a:rPr lang="zh-CN" altLang="en-US" sz="1000" dirty="0">
-                          <a:solidFill>
-                            <a:srgbClr val="333333"/>
-                          </a:solidFill>
-                          <a:latin typeface="Segoe UI"/>
-                          <a:ea typeface="微软雅黑"/>
-                        </a:rPr>
-                        <a:t>掌握度的算法内核；我们在它之上加了验证与遗忘</a:t>
+                        <a:rPr lang="zh-CN" altLang="en-US" sz="1200" dirty="0">
+                          <a:solidFill>
+                            <a:srgbClr val="333333"/>
+                          </a:solidFill>
+                          <a:latin typeface="Segoe UI"/>
+                          <a:ea typeface="微软雅黑"/>
+                        </a:rPr>
+                        <a:t>「主动使用率」列为四个合法优化目标之一；`make replay` 让任何人可拿事件流自行重算</a:t>
                       </a:r>
                     </a:p>
                   </a:txBody>
@@ -3821,101 +3718,6 @@
           </a:graphicData>
         </a:graphic>
       </p:graphicFrame>
-      <p:sp>
-        <p:nvSpPr>
-          <p:cNvPr id="11" name="r11"/>
-          <p:cNvSpPr/>
-          <p:nvPr/>
-        </p:nvSpPr>
-        <p:spPr>
-          <a:xfrm>
-            <a:off x="720000" y="5958000"/>
-            <a:ext cx="10752000" cy="460000"/>
-          </a:xfrm>
-          <a:prstGeom prst="roundRect">
-            <a:avLst>
-              <a:gd name="adj" fmla="val 6000"/>
-            </a:avLst>
-          </a:prstGeom>
-          <a:solidFill>
-            <a:srgbClr val="BF8700">
-              <a:alpha val="10000"/>
-            </a:srgbClr>
-          </a:solidFill>
-          <a:ln>
-            <a:noFill/>
-          </a:ln>
-        </p:spPr>
-        <p:txBody>
-          <a:bodyPr/>
-          <a:lstStyle/>
-          <a:p/>
-        </p:txBody>
-      </p:sp>
-      <p:sp>
-        <p:nvSpPr>
-          <p:cNvPr id="12" name="note"/>
-          <p:cNvSpPr txBox="1"/>
-          <p:nvPr/>
-        </p:nvSpPr>
-        <p:spPr>
-          <a:xfrm>
-            <a:off x="920000" y="5998000"/>
-            <a:ext cx="10352000" cy="400000"/>
-          </a:xfrm>
-          <a:prstGeom prst="rect">
-            <a:avLst/>
-          </a:prstGeom>
-          <a:noFill/>
-        </p:spPr>
-        <p:txBody>
-          <a:bodyPr wrap="square" anchor="t">
-            <a:normAutofit/>
-          </a:bodyPr>
-          <a:lstStyle/>
-          <a:p>
-            <a:pPr lvl="0" marL="0" indent="0" algn="l">
-              <a:lnSpc>
-                <a:spcPct val="118000"/>
-              </a:lnSpc>
-              <a:spcBef>
-                <a:spcPts val="0"/>
-              </a:spcBef>
-              <a:buNone/>
-            </a:pPr>
-            <a:r>
-              <a:rPr lang="zh-CN" altLang="en-US" sz="1400" dirty="0">
-                <a:solidFill>
-                  <a:srgbClr val="8A6400"/>
-                </a:solidFill>
-                <a:latin typeface="Segoe UI"/>
-                <a:ea typeface="微软雅黑"/>
-              </a:rPr>
-              <a:t>两份完整研判在 docs/ 下：《LearnVector 研判》《DeepTutor 研判》。结论一句话：方向上我们与最好的团队一致，</a:t>
-            </a:r>
-            <a:r>
-              <a:rPr lang="zh-CN" altLang="en-US" sz="1400" b="1" dirty="0">
-                <a:solidFill>
-                  <a:srgbClr val="8A6400"/>
-                </a:solidFill>
-                <a:latin typeface="Segoe UI"/>
-                <a:ea typeface="微软雅黑"/>
-              </a:rPr>
-              <a:t>差距在资源与分发，不在判断力</a:t>
-            </a:r>
-            <a:r>
-              <a:rPr lang="zh-CN" altLang="en-US" sz="1400" dirty="0">
-                <a:solidFill>
-                  <a:srgbClr val="8A6400"/>
-                </a:solidFill>
-                <a:latin typeface="Segoe UI"/>
-                <a:ea typeface="微软雅黑"/>
-              </a:rPr>
-              <a:t>。</a:t>
-            </a:r>
-          </a:p>
-        </p:txBody>
-      </p:sp>
       <p:sp>
         <p:nvSpPr>
           <p:cNvPr id="90" name="pg"/>
